--- a/organizations/Organization_Data_Collection_Methodology.pptx
+++ b/organizations/Organization_Data_Collection_Methodology.pptx
@@ -5787,7 +5787,7 @@
                 <a:ea typeface="Georgia" pitchFamily="34" charset="-122"/>
                 <a:cs typeface="Georgia" pitchFamily="34" charset="-120"/>
               </a:rPr>
-              <a:t>The four framework dimensions</a:t>
+              <a:t>The five framework dimensions</a:t>
             </a:r>
             <a:endParaRPr lang="en-US" sz="3100" dirty="0"/>
           </a:p>
@@ -5851,7 +5851,7 @@
                 <a:ea typeface="Calibri" pitchFamily="34" charset="-122"/>
                 <a:cs typeface="Calibri" pitchFamily="34" charset="-120"/>
               </a:rPr>
-              <a:t>The same four we code on the literature side, so we can compare what the field writes against what the field does.</a:t>
+              <a:t>The same five we code on the literature side, so we can compare what the field writes against what the field does.</a:t>
             </a:r>
             <a:endParaRPr lang="en-US" sz="1450" dirty="0"/>
           </a:p>
@@ -5865,12 +5865,12 @@
         </p:nvSpPr>
         <p:spPr>
           <a:xfrm>
-            <a:off x="640080" y="1874520"/>
-            <a:ext cx="10911535" cy="896112"/>
+            <a:off x="640080" y="1755648"/>
+            <a:ext cx="10911535" cy="731520"/>
           </a:xfrm>
           <a:prstGeom prst="roundRect">
             <a:avLst>
-              <a:gd name="adj" fmla="val 7143"/>
+              <a:gd name="adj" fmla="val 8750"/>
             </a:avLst>
           </a:prstGeom>
           <a:solidFill>
@@ -5892,24 +5892,24 @@
         </p:nvSpPr>
         <p:spPr>
           <a:xfrm>
-            <a:off x="932688" y="2093976"/>
-            <a:ext cx="3931920" cy="365760"/>
-          </a:xfrm>
-          <a:prstGeom prst="rect">
-            <a:avLst/>
-          </a:prstGeom>
-          <a:noFill/>
-          <a:ln/>
-        </p:spPr>
-        <p:txBody>
-          <a:bodyPr wrap="square" lIns="0" tIns="0" rIns="0" bIns="0" rtlCol="0" anchor="ctr"/>
-          <a:lstStyle/>
-          <a:p>
-            <a:pPr indent="0" marL="0">
-              <a:buNone/>
-            </a:pPr>
-            <a:r>
-              <a:rPr lang="en-US" sz="1400" b="1" dirty="0">
+            <a:off x="932688" y="1938528"/>
+            <a:ext cx="4206240" cy="365760"/>
+          </a:xfrm>
+          <a:prstGeom prst="rect">
+            <a:avLst/>
+          </a:prstGeom>
+          <a:noFill/>
+          <a:ln/>
+        </p:spPr>
+        <p:txBody>
+          <a:bodyPr wrap="square" lIns="0" tIns="0" rIns="0" bIns="0" rtlCol="0" anchor="ctr"/>
+          <a:lstStyle/>
+          <a:p>
+            <a:pPr indent="0" marL="0">
+              <a:buNone/>
+            </a:pPr>
+            <a:r>
+              <a:rPr lang="en-US" sz="1350" b="1" dirty="0">
                 <a:solidFill>
                   <a:srgbClr val="B5563C"/>
                 </a:solidFill>
@@ -5919,7 +5919,7 @@
               </a:rPr>
               <a:t>who_participates</a:t>
             </a:r>
-            <a:endParaRPr lang="en-US" sz="1400" dirty="0"/>
+            <a:endParaRPr lang="en-US" sz="1350" dirty="0"/>
           </a:p>
         </p:txBody>
       </p:sp>
@@ -5931,8 +5931,8 @@
         </p:nvSpPr>
         <p:spPr>
           <a:xfrm>
-            <a:off x="5120640" y="2075688"/>
-            <a:ext cx="6156655" cy="548640"/>
+            <a:off x="5394960" y="1901952"/>
+            <a:ext cx="5882335" cy="502920"/>
           </a:xfrm>
           <a:prstGeom prst="rect">
             <a:avLst/>
@@ -5946,12 +5946,12 @@
           <a:p>
             <a:pPr indent="0" marL="0">
               <a:lnSpc>
-                <a:spcPts val="1800"/>
+                <a:spcPts val="1700"/>
               </a:lnSpc>
               <a:buNone/>
             </a:pPr>
             <a:r>
-              <a:rPr lang="en-US" sz="1300" dirty="0">
+              <a:rPr lang="en-US" sz="1250" dirty="0">
                 <a:solidFill>
                   <a:srgbClr val="1B3330"/>
                 </a:solidFill>
@@ -5961,7 +5961,7 @@
               </a:rPr>
               <a:t>Who the organization treats as taking part in its work.</a:t>
             </a:r>
-            <a:endParaRPr lang="en-US" sz="1300" dirty="0"/>
+            <a:endParaRPr lang="en-US" sz="1250" dirty="0"/>
           </a:p>
         </p:txBody>
       </p:sp>
@@ -5973,12 +5973,12 @@
         </p:nvSpPr>
         <p:spPr>
           <a:xfrm>
-            <a:off x="640080" y="2880360"/>
-            <a:ext cx="10911535" cy="896112"/>
+            <a:off x="640080" y="2578608"/>
+            <a:ext cx="10911535" cy="731520"/>
           </a:xfrm>
           <a:prstGeom prst="roundRect">
             <a:avLst>
-              <a:gd name="adj" fmla="val 7143"/>
+              <a:gd name="adj" fmla="val 8750"/>
             </a:avLst>
           </a:prstGeom>
           <a:solidFill>
@@ -6000,24 +6000,24 @@
         </p:nvSpPr>
         <p:spPr>
           <a:xfrm>
-            <a:off x="932688" y="3099816"/>
-            <a:ext cx="3931920" cy="365760"/>
-          </a:xfrm>
-          <a:prstGeom prst="rect">
-            <a:avLst/>
-          </a:prstGeom>
-          <a:noFill/>
-          <a:ln/>
-        </p:spPr>
-        <p:txBody>
-          <a:bodyPr wrap="square" lIns="0" tIns="0" rIns="0" bIns="0" rtlCol="0" anchor="ctr"/>
-          <a:lstStyle/>
-          <a:p>
-            <a:pPr indent="0" marL="0">
-              <a:buNone/>
-            </a:pPr>
-            <a:r>
-              <a:rPr lang="en-US" sz="1400" b="1" dirty="0">
+            <a:off x="932688" y="2761488"/>
+            <a:ext cx="4206240" cy="365760"/>
+          </a:xfrm>
+          <a:prstGeom prst="rect">
+            <a:avLst/>
+          </a:prstGeom>
+          <a:noFill/>
+          <a:ln/>
+        </p:spPr>
+        <p:txBody>
+          <a:bodyPr wrap="square" lIns="0" tIns="0" rIns="0" bIns="0" rtlCol="0" anchor="ctr"/>
+          <a:lstStyle/>
+          <a:p>
+            <a:pPr indent="0" marL="0">
+              <a:buNone/>
+            </a:pPr>
+            <a:r>
+              <a:rPr lang="en-US" sz="1350" b="1" dirty="0">
                 <a:solidFill>
                   <a:srgbClr val="B5563C"/>
                 </a:solidFill>
@@ -6027,7 +6027,7 @@
               </a:rPr>
               <a:t>who_benefits</a:t>
             </a:r>
-            <a:endParaRPr lang="en-US" sz="1400" dirty="0"/>
+            <a:endParaRPr lang="en-US" sz="1350" dirty="0"/>
           </a:p>
         </p:txBody>
       </p:sp>
@@ -6039,8 +6039,8 @@
         </p:nvSpPr>
         <p:spPr>
           <a:xfrm>
-            <a:off x="5120640" y="3081528"/>
-            <a:ext cx="6156655" cy="548640"/>
+            <a:off x="5394960" y="2724912"/>
+            <a:ext cx="5882335" cy="502920"/>
           </a:xfrm>
           <a:prstGeom prst="rect">
             <a:avLst/>
@@ -6054,12 +6054,12 @@
           <a:p>
             <a:pPr indent="0" marL="0">
               <a:lnSpc>
-                <a:spcPts val="1800"/>
+                <a:spcPts val="1700"/>
               </a:lnSpc>
               <a:buNone/>
             </a:pPr>
             <a:r>
-              <a:rPr lang="en-US" sz="1300" dirty="0">
+              <a:rPr lang="en-US" sz="1250" dirty="0">
                 <a:solidFill>
                   <a:srgbClr val="1B3330"/>
                 </a:solidFill>
@@ -6067,9 +6067,9 @@
                 <a:ea typeface="Calibri" pitchFamily="34" charset="-122"/>
                 <a:cs typeface="Calibri" pitchFamily="34" charset="-120"/>
               </a:rPr>
-              <a:t>Who the work is understood to be for.</a:t>
-            </a:r>
-            <a:endParaRPr lang="en-US" sz="1300" dirty="0"/>
+              <a:t>Who the work is understood to be for. Not the same as the next field.</a:t>
+            </a:r>
+            <a:endParaRPr lang="en-US" sz="1250" dirty="0"/>
           </a:p>
         </p:txBody>
       </p:sp>
@@ -6081,12 +6081,12 @@
         </p:nvSpPr>
         <p:spPr>
           <a:xfrm>
-            <a:off x="640080" y="3886200"/>
-            <a:ext cx="10911535" cy="896112"/>
+            <a:off x="640080" y="3401568"/>
+            <a:ext cx="10911535" cy="731520"/>
           </a:xfrm>
           <a:prstGeom prst="roundRect">
             <a:avLst>
-              <a:gd name="adj" fmla="val 7143"/>
+              <a:gd name="adj" fmla="val 8750"/>
             </a:avLst>
           </a:prstGeom>
           <a:solidFill>
@@ -6108,24 +6108,24 @@
         </p:nvSpPr>
         <p:spPr>
           <a:xfrm>
-            <a:off x="932688" y="4105656"/>
-            <a:ext cx="3931920" cy="365760"/>
-          </a:xfrm>
-          <a:prstGeom prst="rect">
-            <a:avLst/>
-          </a:prstGeom>
-          <a:noFill/>
-          <a:ln/>
-        </p:spPr>
-        <p:txBody>
-          <a:bodyPr wrap="square" lIns="0" tIns="0" rIns="0" bIns="0" rtlCol="0" anchor="ctr"/>
-          <a:lstStyle/>
-          <a:p>
-            <a:pPr indent="0" marL="0">
-              <a:buNone/>
-            </a:pPr>
-            <a:r>
-              <a:rPr lang="en-US" sz="1400" b="1" dirty="0">
+            <a:off x="932688" y="3584448"/>
+            <a:ext cx="4206240" cy="365760"/>
+          </a:xfrm>
+          <a:prstGeom prst="rect">
+            <a:avLst/>
+          </a:prstGeom>
+          <a:noFill/>
+          <a:ln/>
+        </p:spPr>
+        <p:txBody>
+          <a:bodyPr wrap="square" lIns="0" tIns="0" rIns="0" bIns="0" rtlCol="0" anchor="ctr"/>
+          <a:lstStyle/>
+          <a:p>
+            <a:pPr indent="0" marL="0">
+              <a:buNone/>
+            </a:pPr>
+            <a:r>
+              <a:rPr lang="en-US" sz="1350" b="1" dirty="0">
                 <a:solidFill>
                   <a:srgbClr val="B5563C"/>
                 </a:solidFill>
@@ -6133,9 +6133,9 @@
                 <a:ea typeface="Calibri" pitchFamily="34" charset="-122"/>
                 <a:cs typeface="Calibri" pitchFamily="34" charset="-120"/>
               </a:rPr>
-              <a:t>what_social_good_and_who_decides</a:t>
-            </a:r>
-            <a:endParaRPr lang="en-US" sz="1400" dirty="0"/>
+              <a:t>what_counts_as_social_good</a:t>
+            </a:r>
+            <a:endParaRPr lang="en-US" sz="1350" dirty="0"/>
           </a:p>
         </p:txBody>
       </p:sp>
@@ -6147,8 +6147,8 @@
         </p:nvSpPr>
         <p:spPr>
           <a:xfrm>
-            <a:off x="5120640" y="4087368"/>
-            <a:ext cx="6156655" cy="548640"/>
+            <a:off x="5394960" y="3547872"/>
+            <a:ext cx="5882335" cy="502920"/>
           </a:xfrm>
           <a:prstGeom prst="rect">
             <a:avLst/>
@@ -6162,12 +6162,12 @@
           <a:p>
             <a:pPr indent="0" marL="0">
               <a:lnSpc>
-                <a:spcPts val="1800"/>
+                <a:spcPts val="1700"/>
               </a:lnSpc>
               <a:buNone/>
             </a:pPr>
             <a:r>
-              <a:rPr lang="en-US" sz="1300" dirty="0">
+              <a:rPr lang="en-US" sz="1250" dirty="0">
                 <a:solidFill>
                   <a:srgbClr val="1B3330"/>
                 </a:solidFill>
@@ -6175,9 +6175,9 @@
                 <a:ea typeface="Calibri" pitchFamily="34" charset="-122"/>
                 <a:cs typeface="Calibri" pitchFamily="34" charset="-120"/>
               </a:rPr>
-              <a:t>How the organization defines the good it pursues, and who is positioned to decide that. One field, not two.</a:t>
-            </a:r>
-            <a:endParaRPr lang="en-US" sz="1300" dirty="0"/>
+              <a:t>How the organization defines the good it pursues.</a:t>
+            </a:r>
+            <a:endParaRPr lang="en-US" sz="1250" dirty="0"/>
           </a:p>
         </p:txBody>
       </p:sp>
@@ -6189,12 +6189,12 @@
         </p:nvSpPr>
         <p:spPr>
           <a:xfrm>
-            <a:off x="640080" y="4892040"/>
-            <a:ext cx="10911535" cy="896112"/>
+            <a:off x="640080" y="4224528"/>
+            <a:ext cx="10911535" cy="731520"/>
           </a:xfrm>
           <a:prstGeom prst="roundRect">
             <a:avLst>
-              <a:gd name="adj" fmla="val 7143"/>
+              <a:gd name="adj" fmla="val 8750"/>
             </a:avLst>
           </a:prstGeom>
           <a:solidFill>
@@ -6216,24 +6216,24 @@
         </p:nvSpPr>
         <p:spPr>
           <a:xfrm>
-            <a:off x="932688" y="5111496"/>
-            <a:ext cx="3931920" cy="365760"/>
-          </a:xfrm>
-          <a:prstGeom prst="rect">
-            <a:avLst/>
-          </a:prstGeom>
-          <a:noFill/>
-          <a:ln/>
-        </p:spPr>
-        <p:txBody>
-          <a:bodyPr wrap="square" lIns="0" tIns="0" rIns="0" bIns="0" rtlCol="0" anchor="ctr"/>
-          <a:lstStyle/>
-          <a:p>
-            <a:pPr indent="0" marL="0">
-              <a:buNone/>
-            </a:pPr>
-            <a:r>
-              <a:rPr lang="en-US" sz="1400" b="1" dirty="0">
+            <a:off x="932688" y="4407408"/>
+            <a:ext cx="4206240" cy="365760"/>
+          </a:xfrm>
+          <a:prstGeom prst="rect">
+            <a:avLst/>
+          </a:prstGeom>
+          <a:noFill/>
+          <a:ln/>
+        </p:spPr>
+        <p:txBody>
+          <a:bodyPr wrap="square" lIns="0" tIns="0" rIns="0" bIns="0" rtlCol="0" anchor="ctr"/>
+          <a:lstStyle/>
+          <a:p>
+            <a:pPr indent="0" marL="0">
+              <a:buNone/>
+            </a:pPr>
+            <a:r>
+              <a:rPr lang="en-US" sz="1350" b="1" dirty="0">
                 <a:solidFill>
                   <a:srgbClr val="B5563C"/>
                 </a:solidFill>
@@ -6241,9 +6241,9 @@
                 <a:ea typeface="Calibri" pitchFamily="34" charset="-122"/>
                 <a:cs typeface="Calibri" pitchFamily="34" charset="-120"/>
               </a:rPr>
-              <a:t>what_counts_as_technology</a:t>
-            </a:r>
-            <a:endParaRPr lang="en-US" sz="1400" dirty="0"/>
+              <a:t>who_decides</a:t>
+            </a:r>
+            <a:endParaRPr lang="en-US" sz="1350" dirty="0"/>
           </a:p>
         </p:txBody>
       </p:sp>
@@ -6255,17 +6255,167 @@
         </p:nvSpPr>
         <p:spPr>
           <a:xfrm>
-            <a:off x="5120640" y="5093208"/>
-            <a:ext cx="6156655" cy="548640"/>
-          </a:xfrm>
-          <a:prstGeom prst="rect">
-            <a:avLst/>
-          </a:prstGeom>
-          <a:noFill/>
-          <a:ln/>
-        </p:spPr>
-        <p:txBody>
-          <a:bodyPr wrap="square" lIns="0" tIns="0" rIns="0" bIns="0" rtlCol="0" anchor="ctr"/>
+            <a:off x="5394960" y="4370832"/>
+            <a:ext cx="5882335" cy="502920"/>
+          </a:xfrm>
+          <a:prstGeom prst="rect">
+            <a:avLst/>
+          </a:prstGeom>
+          <a:noFill/>
+          <a:ln/>
+        </p:spPr>
+        <p:txBody>
+          <a:bodyPr wrap="square" lIns="0" tIns="0" rIns="0" bIns="0" rtlCol="0" anchor="ctr"/>
+          <a:lstStyle/>
+          <a:p>
+            <a:pPr indent="0" marL="0">
+              <a:lnSpc>
+                <a:spcPts val="1700"/>
+              </a:lnSpc>
+              <a:buNone/>
+            </a:pPr>
+            <a:r>
+              <a:rPr lang="en-US" sz="1250" dirty="0">
+                <a:solidFill>
+                  <a:srgbClr val="1B3330"/>
+                </a:solidFill>
+                <a:latin typeface="Calibri" pitchFamily="34" charset="0"/>
+                <a:ea typeface="Calibri" pitchFamily="34" charset="-122"/>
+                <a:cs typeface="Calibri" pitchFamily="34" charset="-120"/>
+              </a:rPr>
+              <a:t>Who is positioned to determine what counts as good — the organization, its funder, a board, or the community served.</a:t>
+            </a:r>
+            <a:endParaRPr lang="en-US" sz="1250" dirty="0"/>
+          </a:p>
+        </p:txBody>
+      </p:sp>
+      <p:sp>
+        <p:nvSpPr>
+          <p:cNvPr id="17" name="Shape 15"/>
+          <p:cNvSpPr/>
+          <p:nvPr/>
+        </p:nvSpPr>
+        <p:spPr>
+          <a:xfrm>
+            <a:off x="640080" y="5047488"/>
+            <a:ext cx="10911535" cy="731520"/>
+          </a:xfrm>
+          <a:prstGeom prst="roundRect">
+            <a:avLst>
+              <a:gd name="adj" fmla="val 8750"/>
+            </a:avLst>
+          </a:prstGeom>
+          <a:solidFill>
+            <a:srgbClr val="FFFFFF"/>
+          </a:solidFill>
+          <a:ln w="12700">
+            <a:solidFill>
+              <a:srgbClr val="E4DDD1"/>
+            </a:solidFill>
+            <a:prstDash val="solid"/>
+          </a:ln>
+        </p:spPr>
+      </p:sp>
+      <p:sp>
+        <p:nvSpPr>
+          <p:cNvPr id="18" name="Text 16"/>
+          <p:cNvSpPr txBox="1"/>
+          <p:nvPr/>
+        </p:nvSpPr>
+        <p:spPr>
+          <a:xfrm>
+            <a:off x="932688" y="5230368"/>
+            <a:ext cx="4206240" cy="365760"/>
+          </a:xfrm>
+          <a:prstGeom prst="rect">
+            <a:avLst/>
+          </a:prstGeom>
+          <a:noFill/>
+          <a:ln/>
+        </p:spPr>
+        <p:txBody>
+          <a:bodyPr wrap="square" lIns="0" tIns="0" rIns="0" bIns="0" rtlCol="0" anchor="ctr"/>
+          <a:lstStyle/>
+          <a:p>
+            <a:pPr indent="0" marL="0">
+              <a:buNone/>
+            </a:pPr>
+            <a:r>
+              <a:rPr lang="en-US" sz="1350" b="1" dirty="0">
+                <a:solidFill>
+                  <a:srgbClr val="B5563C"/>
+                </a:solidFill>
+                <a:latin typeface="Calibri" pitchFamily="34" charset="0"/>
+                <a:ea typeface="Calibri" pitchFamily="34" charset="-122"/>
+                <a:cs typeface="Calibri" pitchFamily="34" charset="-120"/>
+              </a:rPr>
+              <a:t>what_counts_as_relevant_technology</a:t>
+            </a:r>
+            <a:endParaRPr lang="en-US" sz="1350" dirty="0"/>
+          </a:p>
+        </p:txBody>
+      </p:sp>
+      <p:sp>
+        <p:nvSpPr>
+          <p:cNvPr id="19" name="Text 17"/>
+          <p:cNvSpPr txBox="1"/>
+          <p:nvPr/>
+        </p:nvSpPr>
+        <p:spPr>
+          <a:xfrm>
+            <a:off x="5394960" y="5193792"/>
+            <a:ext cx="5882335" cy="502920"/>
+          </a:xfrm>
+          <a:prstGeom prst="rect">
+            <a:avLst/>
+          </a:prstGeom>
+          <a:noFill/>
+          <a:ln/>
+        </p:spPr>
+        <p:txBody>
+          <a:bodyPr wrap="square" lIns="0" tIns="0" rIns="0" bIns="0" rtlCol="0" anchor="ctr"/>
+          <a:lstStyle/>
+          <a:p>
+            <a:pPr indent="0" marL="0">
+              <a:lnSpc>
+                <a:spcPts val="1700"/>
+              </a:lnSpc>
+              <a:buNone/>
+            </a:pPr>
+            <a:r>
+              <a:rPr lang="en-US" sz="1250" dirty="0">
+                <a:solidFill>
+                  <a:srgbClr val="1B3330"/>
+                </a:solidFill>
+                <a:latin typeface="Calibri" pitchFamily="34" charset="0"/>
+                <a:ea typeface="Calibri" pitchFamily="34" charset="-122"/>
+                <a:cs typeface="Calibri" pitchFamily="34" charset="-120"/>
+              </a:rPr>
+              <a:t>What the organization treats as the relevant technology of its work. Conceptual scope, not tooling.</a:t>
+            </a:r>
+            <a:endParaRPr lang="en-US" sz="1250" dirty="0"/>
+          </a:p>
+        </p:txBody>
+      </p:sp>
+      <p:sp>
+        <p:nvSpPr>
+          <p:cNvPr id="20" name="Text 18"/>
+          <p:cNvSpPr txBox="1"/>
+          <p:nvPr/>
+        </p:nvSpPr>
+        <p:spPr>
+          <a:xfrm>
+            <a:off x="640080" y="5943600"/>
+            <a:ext cx="10911535" cy="566928"/>
+          </a:xfrm>
+          <a:prstGeom prst="rect">
+            <a:avLst/>
+          </a:prstGeom>
+          <a:noFill/>
+          <a:ln/>
+        </p:spPr>
+        <p:txBody>
+          <a:bodyPr wrap="square" rtlCol="0" anchor="ctr"/>
           <a:lstStyle/>
           <a:p>
             <a:pPr indent="0" marL="0">
@@ -6275,56 +6425,34 @@
               <a:buNone/>
             </a:pPr>
             <a:r>
-              <a:rPr lang="en-US" sz="1300" dirty="0">
-                <a:solidFill>
-                  <a:srgbClr val="1B3330"/>
+              <a:rPr lang="en-US" sz="1250" b="1" i="1" dirty="0">
+                <a:solidFill>
+                  <a:srgbClr val="B5563C"/>
                 </a:solidFill>
                 <a:latin typeface="Calibri" pitchFamily="34" charset="0"/>
                 <a:ea typeface="Calibri" pitchFamily="34" charset="-122"/>
                 <a:cs typeface="Calibri" pitchFamily="34" charset="-120"/>
               </a:rPr>
-              <a:t>What the organization treats as the relevant technology of its work. Conceptual scope, not tooling.</a:t>
-            </a:r>
-            <a:endParaRPr lang="en-US" sz="1300" dirty="0"/>
-          </a:p>
-        </p:txBody>
-      </p:sp>
-      <p:sp>
-        <p:nvSpPr>
-          <p:cNvPr id="17" name="Text 15"/>
-          <p:cNvSpPr txBox="1"/>
-          <p:nvPr/>
-        </p:nvSpPr>
-        <p:spPr>
-          <a:xfrm>
-            <a:off x="640080" y="5943600"/>
-            <a:ext cx="10911535" cy="457200"/>
-          </a:xfrm>
-          <a:prstGeom prst="rect">
-            <a:avLst/>
-          </a:prstGeom>
-          <a:noFill/>
-          <a:ln/>
-        </p:spPr>
-        <p:txBody>
-          <a:bodyPr wrap="square" rtlCol="0" anchor="ctr"/>
-          <a:lstStyle/>
-          <a:p>
-            <a:pPr indent="0" marL="0">
-              <a:buNone/>
-            </a:pPr>
-            <a:r>
-              <a:rPr lang="en-US" sz="1300" i="1" dirty="0">
-                <a:solidFill>
-                  <a:srgbClr val="6B7A75"/>
+              <a:t>Why who_decides is its own field. </a:t>
+            </a:r>
+            <a:pPr indent="0" marL="0">
+              <a:lnSpc>
+                <a:spcPts val="1800"/>
+              </a:lnSpc>
+              <a:buNone/>
+            </a:pPr>
+            <a:r>
+              <a:rPr lang="en-US" sz="1250" i="1" dirty="0">
+                <a:solidFill>
+                  <a:srgbClr val="1B3330"/>
                 </a:solidFill>
                 <a:latin typeface="Calibri" pitchFamily="34" charset="0"/>
                 <a:ea typeface="Calibri" pitchFamily="34" charset="-122"/>
                 <a:cs typeface="Calibri" pitchFamily="34" charset="-120"/>
               </a:rPr>
-              <a:t>Adapted from Arnstein’s (1969) ladder of citizen participation — a shared analytic axis, a way of asking the same questions of everyone, not a scale that ranks anybody.</a:t>
-            </a:r>
-            <a:endParaRPr lang="en-US" sz="1300" dirty="0"/>
+              <a:t>Arnstein’s ladder is a ladder of one thing: who holds the power to decide. Its point is that you can involve people without giving them any say — that’s tokenism, and we can only see it if these two are separate fields.</a:t>
+            </a:r>
+            <a:endParaRPr lang="en-US" sz="1250" dirty="0"/>
           </a:p>
         </p:txBody>
       </p:sp>
@@ -7184,7 +7312,7 @@
           <a:p>
             <a:pPr marL="342900" indent="-342900">
               <a:lnSpc>
-                <a:spcPts val="2200"/>
+                <a:spcPts val="2100"/>
               </a:lnSpc>
               <a:spcAft>
                 <a:spcPts val="300"/>
@@ -7193,7 +7321,7 @@
               <a:buChar char="•"/>
             </a:pPr>
             <a:r>
-              <a:rPr lang="en-US" sz="1400" dirty="0">
+              <a:rPr lang="en-US" sz="1350" dirty="0">
                 <a:solidFill>
                   <a:srgbClr val="1B3330"/>
                 </a:solidFill>
@@ -7203,12 +7331,12 @@
               </a:rPr>
               <a:t>who_participates</a:t>
             </a:r>
-            <a:endParaRPr lang="en-US" sz="1400" dirty="0"/>
+            <a:endParaRPr lang="en-US" sz="1350" dirty="0"/>
           </a:p>
           <a:p>
             <a:pPr marL="342900" indent="-342900">
               <a:lnSpc>
-                <a:spcPts val="2200"/>
+                <a:spcPts val="2100"/>
               </a:lnSpc>
               <a:spcAft>
                 <a:spcPts val="300"/>
@@ -7217,7 +7345,7 @@
               <a:buChar char="•"/>
             </a:pPr>
             <a:r>
-              <a:rPr lang="en-US" sz="1400" dirty="0">
+              <a:rPr lang="en-US" sz="1350" dirty="0">
                 <a:solidFill>
                   <a:srgbClr val="1B3330"/>
                 </a:solidFill>
@@ -7227,12 +7355,12 @@
               </a:rPr>
               <a:t>who_benefits</a:t>
             </a:r>
-            <a:endParaRPr lang="en-US" sz="1400" dirty="0"/>
+            <a:endParaRPr lang="en-US" sz="1350" dirty="0"/>
           </a:p>
           <a:p>
             <a:pPr marL="342900" indent="-342900">
               <a:lnSpc>
-                <a:spcPts val="2200"/>
+                <a:spcPts val="2100"/>
               </a:lnSpc>
               <a:spcAft>
                 <a:spcPts val="300"/>
@@ -7241,7 +7369,7 @@
               <a:buChar char="•"/>
             </a:pPr>
             <a:r>
-              <a:rPr lang="en-US" sz="1400" dirty="0">
+              <a:rPr lang="en-US" sz="1350" dirty="0">
                 <a:solidFill>
                   <a:srgbClr val="1B3330"/>
                 </a:solidFill>
@@ -7249,14 +7377,14 @@
                 <a:ea typeface="Calibri" pitchFamily="34" charset="-122"/>
                 <a:cs typeface="Calibri" pitchFamily="34" charset="-120"/>
               </a:rPr>
-              <a:t>what_social_good_and_who_decides</a:t>
-            </a:r>
-            <a:endParaRPr lang="en-US" sz="1400" dirty="0"/>
+              <a:t>what_counts_as_social_good</a:t>
+            </a:r>
+            <a:endParaRPr lang="en-US" sz="1350" dirty="0"/>
           </a:p>
           <a:p>
             <a:pPr marL="342900" indent="-342900">
               <a:lnSpc>
-                <a:spcPts val="2200"/>
+                <a:spcPts val="2100"/>
               </a:lnSpc>
               <a:spcAft>
                 <a:spcPts val="300"/>
@@ -7265,7 +7393,7 @@
               <a:buChar char="•"/>
             </a:pPr>
             <a:r>
-              <a:rPr lang="en-US" sz="1400" dirty="0">
+              <a:rPr lang="en-US" sz="1350" dirty="0">
                 <a:solidFill>
                   <a:srgbClr val="1B3330"/>
                 </a:solidFill>
@@ -7273,14 +7401,14 @@
                 <a:ea typeface="Calibri" pitchFamily="34" charset="-122"/>
                 <a:cs typeface="Calibri" pitchFamily="34" charset="-120"/>
               </a:rPr>
-              <a:t>what_counts_as_technology</a:t>
-            </a:r>
-            <a:endParaRPr lang="en-US" sz="1400" dirty="0"/>
+              <a:t>who_decides</a:t>
+            </a:r>
+            <a:endParaRPr lang="en-US" sz="1350" dirty="0"/>
           </a:p>
           <a:p>
             <a:pPr marL="342900" indent="-342900">
               <a:lnSpc>
-                <a:spcPts val="2200"/>
+                <a:spcPts val="2100"/>
               </a:lnSpc>
               <a:spcAft>
                 <a:spcPts val="300"/>
@@ -7289,7 +7417,7 @@
               <a:buChar char="•"/>
             </a:pPr>
             <a:r>
-              <a:rPr lang="en-US" sz="1400" dirty="0">
+              <a:rPr lang="en-US" sz="1350" dirty="0">
                 <a:solidFill>
                   <a:srgbClr val="1B3330"/>
                 </a:solidFill>
@@ -7297,9 +7425,9 @@
                 <a:ea typeface="Calibri" pitchFamily="34" charset="-122"/>
                 <a:cs typeface="Calibri" pitchFamily="34" charset="-120"/>
               </a:rPr>
-              <a:t>ecosystem_role</a:t>
-            </a:r>
-            <a:endParaRPr lang="en-US" sz="1400" dirty="0"/>
+              <a:t>what_counts_as_relevant_technology</a:t>
+            </a:r>
+            <a:endParaRPr lang="en-US" sz="1350" dirty="0"/>
           </a:p>
         </p:txBody>
       </p:sp>
@@ -7363,7 +7491,7 @@
                 <a:ea typeface="Georgia" pitchFamily="34" charset="-122"/>
                 <a:cs typeface="Georgia" pitchFamily="34" charset="-120"/>
               </a:rPr>
-              <a:t>Three details on the count</a:t>
+              <a:t>Four details on the count</a:t>
             </a:r>
             <a:endParaRPr lang="en-US" sz="1700" dirty="0"/>
           </a:p>
@@ -7392,16 +7520,16 @@
           <a:p>
             <a:pPr marL="342900" indent="-342900">
               <a:lnSpc>
-                <a:spcPts val="1900"/>
+                <a:spcPts val="1800"/>
               </a:lnSpc>
               <a:spcAft>
-                <a:spcPts val="1000"/>
+                <a:spcPts val="900"/>
               </a:spcAft>
               <a:buSzPct val="100000"/>
               <a:buChar char="•"/>
             </a:pPr>
             <a:r>
-              <a:rPr lang="en-US" sz="1250" dirty="0">
+              <a:rPr lang="en-US" sz="1200" dirty="0">
                 <a:solidFill>
                   <a:srgbClr val="D8D2C6"/>
                 </a:solidFill>
@@ -7409,23 +7537,23 @@
                 <a:ea typeface="Calibri" pitchFamily="34" charset="-122"/>
                 <a:cs typeface="Calibri" pitchFamily="34" charset="-120"/>
               </a:rPr>
-              <a:t>Only an adjudicated new value resets the counter. A new category one of you proposes that Jon adjudicates away doesn’t move it.</a:t>
-            </a:r>
-            <a:endParaRPr lang="en-US" sz="1250" dirty="0"/>
+              <a:t>Only an adjudicated new value resets the counter.</a:t>
+            </a:r>
+            <a:endParaRPr lang="en-US" sz="1200" dirty="0"/>
           </a:p>
           <a:p>
             <a:pPr marL="342900" indent="-342900">
               <a:lnSpc>
-                <a:spcPts val="1900"/>
+                <a:spcPts val="1800"/>
               </a:lnSpc>
               <a:spcAft>
-                <a:spcPts val="1000"/>
+                <a:spcPts val="900"/>
               </a:spcAft>
               <a:buSzPct val="100000"/>
               <a:buChar char="•"/>
             </a:pPr>
             <a:r>
-              <a:rPr lang="en-US" sz="1250" dirty="0">
+              <a:rPr lang="en-US" sz="1200" dirty="0">
                 <a:solidFill>
                   <a:srgbClr val="D8D2C6"/>
                 </a:solidFill>
@@ -7433,23 +7561,23 @@
                 <a:ea typeface="Calibri" pitchFamily="34" charset="-122"/>
                 <a:cs typeface="Calibri" pitchFamily="34" charset="-120"/>
               </a:rPr>
-              <a:t>Organizations excluded at criteria 3, 4 or 5 don’t count toward the six — they were never coded on these fields.</a:t>
-            </a:r>
-            <a:endParaRPr lang="en-US" sz="1250" dirty="0"/>
+              <a:t>An undetermined value does nothing — it doesn’t reset the counter and doesn’t count toward the six.</a:t>
+            </a:r>
+            <a:endParaRPr lang="en-US" sz="1200" dirty="0"/>
           </a:p>
           <a:p>
             <a:pPr marL="342900" indent="-342900">
               <a:lnSpc>
-                <a:spcPts val="1900"/>
+                <a:spcPts val="1800"/>
               </a:lnSpc>
               <a:spcAft>
-                <a:spcPts val="1000"/>
+                <a:spcPts val="900"/>
               </a:spcAft>
               <a:buSzPct val="100000"/>
               <a:buChar char="•"/>
             </a:pPr>
             <a:r>
-              <a:rPr lang="en-US" sz="1250" dirty="0">
+              <a:rPr lang="en-US" sz="1200" dirty="0">
                 <a:solidFill>
                   <a:srgbClr val="D8D2C6"/>
                 </a:solidFill>
@@ -7457,51 +7585,75 @@
                 <a:ea typeface="Calibri" pitchFamily="34" charset="-122"/>
                 <a:cs typeface="Calibri" pitchFamily="34" charset="-120"/>
               </a:rPr>
-              <a:t>The count is per block. Block A can finish while Block C keeps going.</a:t>
-            </a:r>
-            <a:endParaRPr lang="en-US" sz="1250" dirty="0"/>
-          </a:p>
-        </p:txBody>
-      </p:sp>
-      <p:sp>
-        <p:nvSpPr>
-          <p:cNvPr id="12" name="Text 10"/>
-          <p:cNvSpPr txBox="1"/>
-          <p:nvPr/>
-        </p:nvSpPr>
-        <p:spPr>
-          <a:xfrm>
-            <a:off x="640080" y="5989320"/>
-            <a:ext cx="10911535" cy="502920"/>
-          </a:xfrm>
-          <a:prstGeom prst="rect">
-            <a:avLst/>
-          </a:prstGeom>
-          <a:noFill/>
-          <a:ln/>
-        </p:spPr>
-        <p:txBody>
-          <a:bodyPr wrap="square" rtlCol="0" anchor="ctr"/>
-          <a:lstStyle/>
-          <a:p>
-            <a:pPr indent="0" marL="0">
+              <a:t>Organizations excluded at criteria 3, 4 or 5 don’t count — they were never coded on these fields.</a:t>
+            </a:r>
+            <a:endParaRPr lang="en-US" sz="1200" dirty="0"/>
+          </a:p>
+          <a:p>
+            <a:pPr marL="342900" indent="-342900">
               <a:lnSpc>
-                <a:spcPts val="1900"/>
+                <a:spcPts val="1800"/>
               </a:lnSpc>
-              <a:buNone/>
-            </a:pPr>
-            <a:r>
-              <a:rPr lang="en-US" sz="1300" i="1" dirty="0">
-                <a:solidFill>
-                  <a:srgbClr val="5E8B7E"/>
+              <a:spcAft>
+                <a:spcPts val="900"/>
+              </a:spcAft>
+              <a:buSzPct val="100000"/>
+              <a:buChar char="•"/>
+            </a:pPr>
+            <a:r>
+              <a:rPr lang="en-US" sz="1200" dirty="0">
+                <a:solidFill>
+                  <a:srgbClr val="D8D2C6"/>
                 </a:solidFill>
                 <a:latin typeface="Calibri" pitchFamily="34" charset="0"/>
                 <a:ea typeface="Calibri" pitchFamily="34" charset="-122"/>
                 <a:cs typeface="Calibri" pitchFamily="34" charset="-120"/>
               </a:rPr>
-              <a:t>If a block runs out of organizations before six in a row come back empty, that’s a finding about how thin that tradition’s organizational layer is, and we report it as one. We don’t go add more frames to fill it out.</a:t>
-            </a:r>
-            <a:endParaRPr lang="en-US" sz="1300" dirty="0"/>
+              <a:t>The count is per block. Block A can finish while Block C keeps going.</a:t>
+            </a:r>
+            <a:endParaRPr lang="en-US" sz="1200" dirty="0"/>
+          </a:p>
+        </p:txBody>
+      </p:sp>
+      <p:sp>
+        <p:nvSpPr>
+          <p:cNvPr id="12" name="Text 10"/>
+          <p:cNvSpPr txBox="1"/>
+          <p:nvPr/>
+        </p:nvSpPr>
+        <p:spPr>
+          <a:xfrm>
+            <a:off x="640080" y="5989320"/>
+            <a:ext cx="10911535" cy="502920"/>
+          </a:xfrm>
+          <a:prstGeom prst="rect">
+            <a:avLst/>
+          </a:prstGeom>
+          <a:noFill/>
+          <a:ln/>
+        </p:spPr>
+        <p:txBody>
+          <a:bodyPr wrap="square" rtlCol="0" anchor="ctr"/>
+          <a:lstStyle/>
+          <a:p>
+            <a:pPr indent="0" marL="0">
+              <a:lnSpc>
+                <a:spcPts val="1800"/>
+              </a:lnSpc>
+              <a:buNone/>
+            </a:pPr>
+            <a:r>
+              <a:rPr lang="en-US" sz="1250" i="1" dirty="0">
+                <a:solidFill>
+                  <a:srgbClr val="5E8B7E"/>
+                </a:solidFill>
+                <a:latin typeface="Calibri" pitchFamily="34" charset="0"/>
+                <a:ea typeface="Calibri" pitchFamily="34" charset="-122"/>
+                <a:cs typeface="Calibri" pitchFamily="34" charset="-120"/>
+              </a:rPr>
+              <a:t>ecosystem_role is not on this list, though you still code it on every record. It’s a fixed list of five values rather than a rubric — it can only register the first time a block sees a funder or a convener, which happens early and then never again.</a:t>
+            </a:r>
+            <a:endParaRPr lang="en-US" sz="1250" dirty="0"/>
           </a:p>
         </p:txBody>
       </p:sp>
